--- a/examples/arch-diagram/layered-arch/arch.pptx
+++ b/examples/arch-diagram/layered-arch/arch.pptx
@@ -3777,9 +3777,44 @@
           </a:fontRef>
         </p:style>
       </p:cxnSp>
+      <p:sp>
+        <p:nvSpPr>
+          <p:cNvPr id="15" name="TextBox 14"/>
+          <p:cNvSpPr txBox="1"/>
+          <p:nvPr/>
+        </p:nvSpPr>
+        <p:spPr>
+          <a:xfrm>
+            <a:off x="4478920" y="1262318"/>
+            <a:ext cx="914400" cy="274320"/>
+          </a:xfrm>
+          <a:prstGeom prst="rect">
+            <a:avLst/>
+          </a:prstGeom>
+          <a:noFill/>
+        </p:spPr>
+        <p:txBody>
+          <a:bodyPr wrap="none" lIns="0" rIns="0">
+            <a:spAutoFit/>
+          </a:bodyPr>
+          <a:lstStyle/>
+          <a:p>
+            <a:pPr algn="ctr"/>
+            <a:r>
+              <a:rPr sz="800">
+                <a:solidFill>
+                  <a:srgbClr val="4B5158"/>
+                </a:solidFill>
+                <a:latin typeface="Times New Roman"/>
+              </a:rPr>
+              <a:t>HTTPS</a:t>
+            </a:r>
+          </a:p>
+        </p:txBody>
+      </p:sp>
       <p:cxnSp>
         <p:nvCxnSpPr>
-          <p:cNvPr id="15" name="Connector 14"/>
+          <p:cNvPr id="16" name="Connector 15"/>
           <p:cNvCxnSpPr/>
           <p:nvPr/>
         </p:nvCxnSpPr>
@@ -3812,9 +3847,44 @@
           </a:fontRef>
         </p:style>
       </p:cxnSp>
+      <p:sp>
+        <p:nvSpPr>
+          <p:cNvPr id="17" name="TextBox 16"/>
+          <p:cNvSpPr txBox="1"/>
+          <p:nvPr/>
+        </p:nvSpPr>
+        <p:spPr>
+          <a:xfrm>
+            <a:off x="4865495" y="2132112"/>
+            <a:ext cx="914400" cy="274320"/>
+          </a:xfrm>
+          <a:prstGeom prst="rect">
+            <a:avLst/>
+          </a:prstGeom>
+          <a:noFill/>
+        </p:spPr>
+        <p:txBody>
+          <a:bodyPr wrap="none" lIns="0" rIns="0">
+            <a:spAutoFit/>
+          </a:bodyPr>
+          <a:lstStyle/>
+          <a:p>
+            <a:pPr algn="ctr"/>
+            <a:r>
+              <a:rPr sz="800">
+                <a:solidFill>
+                  <a:srgbClr val="4B5158"/>
+                </a:solidFill>
+                <a:latin typeface="Times New Roman"/>
+              </a:rPr>
+              <a:t>RPC</a:t>
+            </a:r>
+          </a:p>
+        </p:txBody>
+      </p:sp>
       <p:cxnSp>
         <p:nvCxnSpPr>
-          <p:cNvPr id="16" name="Connector 15"/>
+          <p:cNvPr id="18" name="Connector 17"/>
           <p:cNvCxnSpPr/>
           <p:nvPr/>
         </p:nvCxnSpPr>
@@ -3847,9 +3917,44 @@
           </a:fontRef>
         </p:style>
       </p:cxnSp>
+      <p:sp>
+        <p:nvSpPr>
+          <p:cNvPr id="19" name="TextBox 18"/>
+          <p:cNvSpPr txBox="1"/>
+          <p:nvPr/>
+        </p:nvSpPr>
+        <p:spPr>
+          <a:xfrm>
+            <a:off x="5252071" y="3001908"/>
+            <a:ext cx="914400" cy="274320"/>
+          </a:xfrm>
+          <a:prstGeom prst="rect">
+            <a:avLst/>
+          </a:prstGeom>
+          <a:noFill/>
+        </p:spPr>
+        <p:txBody>
+          <a:bodyPr wrap="none" lIns="0" rIns="0">
+            <a:spAutoFit/>
+          </a:bodyPr>
+          <a:lstStyle/>
+          <a:p>
+            <a:pPr algn="ctr"/>
+            <a:r>
+              <a:rPr sz="800">
+                <a:solidFill>
+                  <a:srgbClr val="4B5158"/>
+                </a:solidFill>
+                <a:latin typeface="Times New Roman"/>
+              </a:rPr>
+              <a:t>dispatch</a:t>
+            </a:r>
+          </a:p>
+        </p:txBody>
+      </p:sp>
       <p:cxnSp>
         <p:nvCxnSpPr>
-          <p:cNvPr id="17" name="Connector 16"/>
+          <p:cNvPr id="20" name="Connector 19"/>
           <p:cNvCxnSpPr/>
           <p:nvPr/>
         </p:nvCxnSpPr>
@@ -3882,9 +3987,44 @@
           </a:fontRef>
         </p:style>
       </p:cxnSp>
+      <p:sp>
+        <p:nvSpPr>
+          <p:cNvPr id="21" name="TextBox 20"/>
+          <p:cNvSpPr txBox="1"/>
+          <p:nvPr/>
+        </p:nvSpPr>
+        <p:spPr>
+          <a:xfrm>
+            <a:off x="6411798" y="4161635"/>
+            <a:ext cx="914400" cy="274320"/>
+          </a:xfrm>
+          <a:prstGeom prst="rect">
+            <a:avLst/>
+          </a:prstGeom>
+          <a:noFill/>
+        </p:spPr>
+        <p:txBody>
+          <a:bodyPr wrap="none" lIns="0" rIns="0">
+            <a:spAutoFit/>
+          </a:bodyPr>
+          <a:lstStyle/>
+          <a:p>
+            <a:pPr algn="ctr"/>
+            <a:r>
+              <a:rPr sz="800">
+                <a:solidFill>
+                  <a:srgbClr val="4B5158"/>
+                </a:solidFill>
+                <a:latin typeface="Times New Roman"/>
+              </a:rPr>
+              <a:t>publish</a:t>
+            </a:r>
+          </a:p>
+        </p:txBody>
+      </p:sp>
       <p:cxnSp>
         <p:nvCxnSpPr>
-          <p:cNvPr id="18" name="Connector 17"/>
+          <p:cNvPr id="22" name="Connector 21"/>
           <p:cNvCxnSpPr/>
           <p:nvPr/>
         </p:nvCxnSpPr>
@@ -3917,9 +4057,44 @@
           </a:fontRef>
         </p:style>
       </p:cxnSp>
+      <p:sp>
+        <p:nvSpPr>
+          <p:cNvPr id="23" name="TextBox 22"/>
+          <p:cNvSpPr txBox="1"/>
+          <p:nvPr/>
+        </p:nvSpPr>
+        <p:spPr>
+          <a:xfrm>
+            <a:off x="4865495" y="4161635"/>
+            <a:ext cx="914400" cy="274320"/>
+          </a:xfrm>
+          <a:prstGeom prst="rect">
+            <a:avLst/>
+          </a:prstGeom>
+          <a:noFill/>
+        </p:spPr>
+        <p:txBody>
+          <a:bodyPr wrap="none" lIns="0" rIns="0">
+            <a:spAutoFit/>
+          </a:bodyPr>
+          <a:lstStyle/>
+          <a:p>
+            <a:pPr algn="ctr"/>
+            <a:r>
+              <a:rPr sz="800">
+                <a:solidFill>
+                  <a:srgbClr val="4B5158"/>
+                </a:solidFill>
+                <a:latin typeface="Times New Roman"/>
+              </a:rPr>
+              <a:t>SQL</a:t>
+            </a:r>
+          </a:p>
+        </p:txBody>
+      </p:sp>
       <p:cxnSp>
         <p:nvCxnSpPr>
-          <p:cNvPr id="19" name="Connector 18"/>
+          <p:cNvPr id="24" name="Connector 23"/>
           <p:cNvCxnSpPr/>
           <p:nvPr/>
         </p:nvCxnSpPr>
@@ -3952,6 +4127,41 @@
           </a:fontRef>
         </p:style>
       </p:cxnSp>
+      <p:sp>
+        <p:nvSpPr>
+          <p:cNvPr id="25" name="TextBox 24"/>
+          <p:cNvSpPr txBox="1"/>
+          <p:nvPr/>
+        </p:nvSpPr>
+        <p:spPr>
+          <a:xfrm>
+            <a:off x="4478920" y="4161635"/>
+            <a:ext cx="914400" cy="274320"/>
+          </a:xfrm>
+          <a:prstGeom prst="rect">
+            <a:avLst/>
+          </a:prstGeom>
+          <a:noFill/>
+        </p:spPr>
+        <p:txBody>
+          <a:bodyPr wrap="none" lIns="0" rIns="0">
+            <a:spAutoFit/>
+          </a:bodyPr>
+          <a:lstStyle/>
+          <a:p>
+            <a:pPr algn="ctr"/>
+            <a:r>
+              <a:rPr sz="800">
+                <a:solidFill>
+                  <a:srgbClr val="4B5158"/>
+                </a:solidFill>
+                <a:latin typeface="Times New Roman"/>
+              </a:rPr>
+              <a:t>read</a:t>
+            </a:r>
+          </a:p>
+        </p:txBody>
+      </p:sp>
     </p:spTree>
   </p:cSld>
   <p:clrMapOvr>
